--- a/classes/parte-13-seguridad-movil-iot-e-inalambrica/268-analisis-de-hardware-uart-jtag-y-spi/clase-268-presentacion.pptx
+++ b/classes/parte-13-seguridad-movil-iot-e-inalambrica/268-analisis-de-hardware-uart-jtag-y-spi/clase-268-presentacion.pptx
@@ -17,6 +17,10 @@
     <p:sldId id="265" r:id="rId16"/>
     <p:sldId id="266" r:id="rId17"/>
     <p:sldId id="267" r:id="rId18"/>
+    <p:sldId id="268" r:id="rId19"/>
+    <p:sldId id="269" r:id="rId20"/>
+    <p:sldId id="270" r:id="rId21"/>
+    <p:sldId id="271" r:id="rId22"/>
   </p:sldIdLst>
   <p:sldSz cx="9144000" cy="6858000" type="screen4x3"/>
   <p:notesSz cx="6858000" cy="9144000"/>
@@ -3198,7 +3202,7 @@
                   <a:srgbClr val="0B3D2E"/>
                 </a:solidFill>
               </a:rPr>
-              <a:t>⚠️ Errores comunes</a:t>
+              <a:t>🧪 Laboratorio guiado</a:t>
             </a:r>
           </a:p>
         </p:txBody>
@@ -3236,67 +3240,97 @@
                   <a:srgbClr val="22282E"/>
                 </a:solidFill>
               </a:rPr>
-              <a:t>•  Consola serie muestra basura — Baud rate incorrecto; prueba 9600/57600/115200</a:t>
-            </a:r>
-          </a:p>
-          <a:p>
-            <a:pPr>
-              <a:spcAft>
-                <a:spcPts val="600"/>
-              </a:spcAft>
-            </a:pPr>
-            <a:r>
-              <a:rPr sz="1500">
-                <a:solidFill>
-                  <a:srgbClr val="22282E"/>
-                </a:solidFill>
-              </a:rPr>
-              <a:t>•  No hay salida por UART — TX/RX invertidos o pin equivocado; cruza TX↔RX y reidentifica</a:t>
-            </a:r>
-          </a:p>
-          <a:p>
-            <a:pPr>
-              <a:spcAft>
-                <a:spcPts val="600"/>
-              </a:spcAft>
-            </a:pPr>
-            <a:r>
-              <a:rPr sz="1500">
-                <a:solidFill>
-                  <a:srgbClr val="22282E"/>
-                </a:solidFill>
-              </a:rPr>
-              <a:t>•  Dispositivo se reinicia al conectar — Alimentaste VCC indebidamente; no conectes VCC si se auto-alimenta</a:t>
-            </a:r>
-          </a:p>
-          <a:p>
-            <a:pPr>
-              <a:spcAft>
-                <a:spcPts val="600"/>
-              </a:spcAft>
-            </a:pPr>
-            <a:r>
-              <a:rPr sz="1500">
-                <a:solidFill>
-                  <a:srgbClr val="22282E"/>
-                </a:solidFill>
-              </a:rPr>
-              <a:t>•  OpenOCD no detecta el target — Archivo de config equivocado o JTAG deshabilitado por fusible</a:t>
-            </a:r>
-          </a:p>
-          <a:p>
-            <a:pPr>
-              <a:spcAft>
-                <a:spcPts val="600"/>
-              </a:spcAft>
-            </a:pPr>
-            <a:r>
-              <a:rPr sz="1500">
-                <a:solidFill>
-                  <a:srgbClr val="22282E"/>
-                </a:solidFill>
-              </a:rPr>
-              <a:t>•  flashrom no reconoce el chip — Mal contacto de la pinza o chip no soportado; especifica -c manualmente</a:t>
+              <a:t>•  Inspecciona la PCB de un dispositivo propio: busca cabeceras de 4 pines (UART) y de 2x5/10 pines (JTAG), y el chip de flash (SOIC-8).</a:t>
+            </a:r>
+          </a:p>
+          <a:p>
+            <a:pPr>
+              <a:spcAft>
+                <a:spcPts val="600"/>
+              </a:spcAft>
+            </a:pPr>
+            <a:r>
+              <a:rPr sz="1500">
+                <a:solidFill>
+                  <a:srgbClr val="22282E"/>
+                </a:solidFill>
+              </a:rPr>
+              <a:t>•  Identifica el pinout UART: con el multímetro localiza GND (continuidad al plano de tierra), VCC (~3.3 V), y usa el analizador lógico para hallar TX (actividad al arrancar) y el baud rate.</a:t>
+            </a:r>
+          </a:p>
+          <a:p>
+            <a:pPr>
+              <a:spcAft>
+                <a:spcPts val="600"/>
+              </a:spcAft>
+            </a:pPr>
+            <a:r>
+              <a:rPr sz="1500">
+                <a:solidFill>
+                  <a:srgbClr val="22282E"/>
+                </a:solidFill>
+              </a:rPr>
+              <a:t>•  Conecta el adaptador UART (TX↔RX cruzados, GND común, sin conectar VCC si el equipo se auto-alimenta) y abre la consola con screen.</a:t>
+            </a:r>
+          </a:p>
+          <a:p>
+            <a:pPr>
+              <a:spcAft>
+                <a:spcPts val="600"/>
+              </a:spcAft>
+            </a:pPr>
+            <a:r>
+              <a:rPr sz="1500">
+                <a:solidFill>
+                  <a:srgbClr val="22282E"/>
+                </a:solidFill>
+              </a:rPr>
+              <a:t>•  Captura el arranque: observa los logs de U-Boot; intenta interrumpirlo para entrar a su consola.</a:t>
+            </a:r>
+          </a:p>
+          <a:p>
+            <a:pPr>
+              <a:spcAft>
+                <a:spcPts val="600"/>
+              </a:spcAft>
+            </a:pPr>
+            <a:r>
+              <a:rPr sz="1500">
+                <a:solidFill>
+                  <a:srgbClr val="22282E"/>
+                </a:solidFill>
+              </a:rPr>
+              <a:t>•  Busca shell: al terminar el arranque, comprueba si hay una consola root sin contraseña.</a:t>
+            </a:r>
+          </a:p>
+          <a:p>
+            <a:pPr>
+              <a:spcAft>
+                <a:spcPts val="600"/>
+              </a:spcAft>
+            </a:pPr>
+            <a:r>
+              <a:rPr sz="1500">
+                <a:solidFill>
+                  <a:srgbClr val="22282E"/>
+                </a:solidFill>
+              </a:rPr>
+              <a:t>•  JTAG/SWD: conecta el adaptador, lanza OpenOCD, halt el CPU y dumpimage de la flash/RAM.</a:t>
+            </a:r>
+          </a:p>
+          <a:p>
+            <a:pPr>
+              <a:spcAft>
+                <a:spcPts val="600"/>
+              </a:spcAft>
+            </a:pPr>
+            <a:r>
+              <a:rPr sz="1500">
+                <a:solidFill>
+                  <a:srgbClr val="22282E"/>
+                </a:solidFill>
+              </a:rPr>
+              <a:t>•  SPI directo: con la pinza SOIC sobre el chip de flash, vuelca su contenido con flashrom y analízalo con binwalk (clase 267).</a:t>
             </a:r>
           </a:p>
         </p:txBody>
@@ -3347,7 +3381,7 @@
                   <a:srgbClr val="0B3D2E"/>
                 </a:solidFill>
               </a:rPr>
-              <a:t>❓ Preguntas frecuentes</a:t>
+              <a:t>✍️ Ejercicios</a:t>
             </a:r>
           </a:p>
         </p:txBody>
@@ -3385,82 +3419,82 @@
                   <a:srgbClr val="22282E"/>
                 </a:solidFill>
               </a:rPr>
-              <a:t>•  ❓ ¿Cómo sé qué pin es UART sin documentación?</a:t>
-            </a:r>
-          </a:p>
-          <a:p>
-            <a:pPr>
-              <a:spcAft>
-                <a:spcPts val="600"/>
-              </a:spcAft>
-            </a:pPr>
-            <a:r>
-              <a:rPr sz="1500">
-                <a:solidFill>
-                  <a:srgbClr val="22282E"/>
-                </a:solidFill>
-              </a:rPr>
-              <a:t>•  Mide con multímetro (GND por continuidad, VCC ~3.3 V estable) y con el analizador lógico observa qué pin tiene ráfagas de datos al encender: ese es TX.</a:t>
-            </a:r>
-          </a:p>
-          <a:p>
-            <a:pPr>
-              <a:spcAft>
-                <a:spcPts val="600"/>
-              </a:spcAft>
-            </a:pPr>
-            <a:r>
-              <a:rPr sz="1500">
-                <a:solidFill>
-                  <a:srgbClr val="22282E"/>
-                </a:solidFill>
-              </a:rPr>
-              <a:t>•  ❓ ¿Puedo dañar el dispositivo?</a:t>
-            </a:r>
-          </a:p>
-          <a:p>
-            <a:pPr>
-              <a:spcAft>
-                <a:spcPts val="600"/>
-              </a:spcAft>
-            </a:pPr>
-            <a:r>
-              <a:rPr sz="1500">
-                <a:solidFill>
-                  <a:srgbClr val="22282E"/>
-                </a:solidFill>
-              </a:rPr>
-              <a:t>•  Sí, si aplicas voltaje incorrecto o cortocircuitas pines. Trabaja a 3.3 V, verifica antes de conectar VCC y usa un adaptador con el mismo nivel lógico.</a:t>
-            </a:r>
-          </a:p>
-          <a:p>
-            <a:pPr>
-              <a:spcAft>
-                <a:spcPts val="600"/>
-              </a:spcAft>
-            </a:pPr>
-            <a:r>
-              <a:rPr sz="1500">
-                <a:solidFill>
-                  <a:srgbClr val="22282E"/>
-                </a:solidFill>
-              </a:rPr>
-              <a:t>•  ❓ ¿Por qué usar SPI si ya tengo UART?</a:t>
-            </a:r>
-          </a:p>
-          <a:p>
-            <a:pPr>
-              <a:spcAft>
-                <a:spcPts val="600"/>
-              </a:spcAft>
-            </a:pPr>
-            <a:r>
-              <a:rPr sz="1500">
-                <a:solidFill>
-                  <a:srgbClr val="22282E"/>
-                </a:solidFill>
-              </a:rPr>
-              <a:t>•  UART puede no dar shell o exponer solo parte del sistema; leer el flash por SPI extrae la imagen completa aunque el software lo impida.</a:t>
+              <a:t>•  Identifica y etiqueta el pinout UART de una placa propia usando multímetro y analizador lógico.</a:t>
+            </a:r>
+          </a:p>
+          <a:p>
+            <a:pPr>
+              <a:spcAft>
+                <a:spcPts val="600"/>
+              </a:spcAft>
+            </a:pPr>
+            <a:r>
+              <a:rPr sz="1500">
+                <a:solidFill>
+                  <a:srgbClr val="22282E"/>
+                </a:solidFill>
+              </a:rPr>
+              <a:t>•  Captura y guarda el log de arranque completo por UART.</a:t>
+            </a:r>
+          </a:p>
+          <a:p>
+            <a:pPr>
+              <a:spcAft>
+                <a:spcPts val="600"/>
+              </a:spcAft>
+            </a:pPr>
+            <a:r>
+              <a:rPr sz="1500">
+                <a:solidFill>
+                  <a:srgbClr val="22282E"/>
+                </a:solidFill>
+              </a:rPr>
+              <a:t>•  Interrumpe U-Boot y lista sus variables de entorno.</a:t>
+            </a:r>
+          </a:p>
+          <a:p>
+            <a:pPr>
+              <a:spcAft>
+                <a:spcPts val="600"/>
+              </a:spcAft>
+            </a:pPr>
+            <a:r>
+              <a:rPr sz="1500">
+                <a:solidFill>
+                  <a:srgbClr val="22282E"/>
+                </a:solidFill>
+              </a:rPr>
+              <a:t>•  Vuelca el flash SPI con flashrom y verifica su tamaño esperado.</a:t>
+            </a:r>
+          </a:p>
+          <a:p>
+            <a:pPr>
+              <a:spcAft>
+                <a:spcPts val="600"/>
+              </a:spcAft>
+            </a:pPr>
+            <a:r>
+              <a:rPr sz="1500">
+                <a:solidFill>
+                  <a:srgbClr val="22282E"/>
+                </a:solidFill>
+              </a:rPr>
+              <a:t>•  Con OpenOCD, detén el CPU y lee una región de memoria.</a:t>
+            </a:r>
+          </a:p>
+          <a:p>
+            <a:pPr>
+              <a:spcAft>
+                <a:spcPts val="600"/>
+              </a:spcAft>
+            </a:pPr>
+            <a:r>
+              <a:rPr sz="1500">
+                <a:solidFill>
+                  <a:srgbClr val="22282E"/>
+                </a:solidFill>
+              </a:rPr>
+              <a:t>•  Compara el firmware obtenido por SPI con la descarga oficial (si existe).</a:t>
             </a:r>
           </a:p>
         </p:txBody>
@@ -3511,7 +3545,7 @@
                   <a:srgbClr val="0B3D2E"/>
                 </a:solidFill>
               </a:rPr>
-              <a:t>🔗 Referencias</a:t>
+              <a:t>📝 Reto verificable</a:t>
             </a:r>
           </a:p>
         </p:txBody>
@@ -3549,6 +3583,408 @@
                   <a:srgbClr val="22282E"/>
                 </a:solidFill>
               </a:rPr>
+              <a:t>•  Obtén evidencia de un dispositivo de laboratorio por dos observaciones no destructivas —por ejemplo, log UART y dos lecturas SPI coincidentes—. Criterio de aceptación: documentas pinout, niveles…</a:t>
+            </a:r>
+          </a:p>
+        </p:txBody>
+      </p:sp>
+    </p:spTree>
+  </p:cSld>
+  <p:clrMapOvr>
+    <a:masterClrMapping/>
+  </p:clrMapOvr>
+</p:sld>
+</file>
+
+<file path=ppt/slides/slide13.xml><?xml version="1.0" encoding="utf-8"?>
+<p:sld xmlns:a="http://schemas.openxmlformats.org/drawingml/2006/main" xmlns:p="http://schemas.openxmlformats.org/presentationml/2006/main" xmlns:r="http://schemas.openxmlformats.org/officeDocument/2006/relationships">
+  <p:cSld>
+    <p:spTree>
+      <p:nvGrpSpPr>
+        <p:cNvPr id="1" name=""/>
+        <p:cNvGrpSpPr/>
+        <p:nvPr/>
+      </p:nvGrpSpPr>
+      <p:grpSpPr/>
+      <p:sp>
+        <p:nvSpPr>
+          <p:cNvPr id="2" name="TextBox 1"/>
+          <p:cNvSpPr txBox="1"/>
+          <p:nvPr/>
+        </p:nvSpPr>
+        <p:spPr>
+          <a:xfrm>
+            <a:off x="457200" y="320040"/>
+            <a:ext cx="8229600" cy="822960"/>
+          </a:xfrm>
+          <a:prstGeom prst="rect">
+            <a:avLst/>
+          </a:prstGeom>
+          <a:noFill/>
+        </p:spPr>
+        <p:txBody>
+          <a:bodyPr wrap="square">
+            <a:spAutoFit/>
+          </a:bodyPr>
+          <a:lstStyle/>
+          <a:p>
+            <a:r>
+              <a:rPr sz="2600" b="1">
+                <a:solidFill>
+                  <a:srgbClr val="0B3D2E"/>
+                </a:solidFill>
+              </a:rPr>
+              <a:t>⚠️ Errores comunes</a:t>
+            </a:r>
+          </a:p>
+        </p:txBody>
+      </p:sp>
+      <p:sp>
+        <p:nvSpPr>
+          <p:cNvPr id="3" name="TextBox 2"/>
+          <p:cNvSpPr txBox="1"/>
+          <p:nvPr/>
+        </p:nvSpPr>
+        <p:spPr>
+          <a:xfrm>
+            <a:off x="457200" y="1280160"/>
+            <a:ext cx="8229600" cy="4937760"/>
+          </a:xfrm>
+          <a:prstGeom prst="rect">
+            <a:avLst/>
+          </a:prstGeom>
+          <a:noFill/>
+        </p:spPr>
+        <p:txBody>
+          <a:bodyPr wrap="square">
+            <a:spAutoFit/>
+          </a:bodyPr>
+          <a:lstStyle/>
+          <a:p>
+            <a:pPr>
+              <a:spcAft>
+                <a:spcPts val="600"/>
+              </a:spcAft>
+            </a:pPr>
+            <a:r>
+              <a:rPr sz="1500">
+                <a:solidFill>
+                  <a:srgbClr val="22282E"/>
+                </a:solidFill>
+              </a:rPr>
+              <a:t>•  Consola serie muestra basura — Baud rate incorrecto; prueba 9600/57600/115200</a:t>
+            </a:r>
+          </a:p>
+          <a:p>
+            <a:pPr>
+              <a:spcAft>
+                <a:spcPts val="600"/>
+              </a:spcAft>
+            </a:pPr>
+            <a:r>
+              <a:rPr sz="1500">
+                <a:solidFill>
+                  <a:srgbClr val="22282E"/>
+                </a:solidFill>
+              </a:rPr>
+              <a:t>•  No hay salida por UART — TX/RX invertidos o pin equivocado; cruza TX↔RX y reidentifica</a:t>
+            </a:r>
+          </a:p>
+          <a:p>
+            <a:pPr>
+              <a:spcAft>
+                <a:spcPts val="600"/>
+              </a:spcAft>
+            </a:pPr>
+            <a:r>
+              <a:rPr sz="1500">
+                <a:solidFill>
+                  <a:srgbClr val="22282E"/>
+                </a:solidFill>
+              </a:rPr>
+              <a:t>•  Dispositivo se reinicia al conectar — Alimentaste VCC indebidamente; no conectes VCC si se auto-alimenta</a:t>
+            </a:r>
+          </a:p>
+          <a:p>
+            <a:pPr>
+              <a:spcAft>
+                <a:spcPts val="600"/>
+              </a:spcAft>
+            </a:pPr>
+            <a:r>
+              <a:rPr sz="1500">
+                <a:solidFill>
+                  <a:srgbClr val="22282E"/>
+                </a:solidFill>
+              </a:rPr>
+              <a:t>•  OpenOCD no detecta el target — Archivo de config equivocado o JTAG deshabilitado por fusible</a:t>
+            </a:r>
+          </a:p>
+          <a:p>
+            <a:pPr>
+              <a:spcAft>
+                <a:spcPts val="600"/>
+              </a:spcAft>
+            </a:pPr>
+            <a:r>
+              <a:rPr sz="1500">
+                <a:solidFill>
+                  <a:srgbClr val="22282E"/>
+                </a:solidFill>
+              </a:rPr>
+              <a:t>•  flashrom no reconoce el chip — Mal contacto de la pinza o chip no soportado; especifica -c manualmente</a:t>
+            </a:r>
+          </a:p>
+        </p:txBody>
+      </p:sp>
+    </p:spTree>
+  </p:cSld>
+  <p:clrMapOvr>
+    <a:masterClrMapping/>
+  </p:clrMapOvr>
+</p:sld>
+</file>
+
+<file path=ppt/slides/slide14.xml><?xml version="1.0" encoding="utf-8"?>
+<p:sld xmlns:a="http://schemas.openxmlformats.org/drawingml/2006/main" xmlns:p="http://schemas.openxmlformats.org/presentationml/2006/main" xmlns:r="http://schemas.openxmlformats.org/officeDocument/2006/relationships">
+  <p:cSld>
+    <p:spTree>
+      <p:nvGrpSpPr>
+        <p:cNvPr id="1" name=""/>
+        <p:cNvGrpSpPr/>
+        <p:nvPr/>
+      </p:nvGrpSpPr>
+      <p:grpSpPr/>
+      <p:sp>
+        <p:nvSpPr>
+          <p:cNvPr id="2" name="TextBox 1"/>
+          <p:cNvSpPr txBox="1"/>
+          <p:nvPr/>
+        </p:nvSpPr>
+        <p:spPr>
+          <a:xfrm>
+            <a:off x="457200" y="320040"/>
+            <a:ext cx="8229600" cy="822960"/>
+          </a:xfrm>
+          <a:prstGeom prst="rect">
+            <a:avLst/>
+          </a:prstGeom>
+          <a:noFill/>
+        </p:spPr>
+        <p:txBody>
+          <a:bodyPr wrap="square">
+            <a:spAutoFit/>
+          </a:bodyPr>
+          <a:lstStyle/>
+          <a:p>
+            <a:r>
+              <a:rPr sz="2600" b="1">
+                <a:solidFill>
+                  <a:srgbClr val="0B3D2E"/>
+                </a:solidFill>
+              </a:rPr>
+              <a:t>❓ Preguntas frecuentes</a:t>
+            </a:r>
+          </a:p>
+        </p:txBody>
+      </p:sp>
+      <p:sp>
+        <p:nvSpPr>
+          <p:cNvPr id="3" name="TextBox 2"/>
+          <p:cNvSpPr txBox="1"/>
+          <p:nvPr/>
+        </p:nvSpPr>
+        <p:spPr>
+          <a:xfrm>
+            <a:off x="457200" y="1280160"/>
+            <a:ext cx="8229600" cy="4937760"/>
+          </a:xfrm>
+          <a:prstGeom prst="rect">
+            <a:avLst/>
+          </a:prstGeom>
+          <a:noFill/>
+        </p:spPr>
+        <p:txBody>
+          <a:bodyPr wrap="square">
+            <a:spAutoFit/>
+          </a:bodyPr>
+          <a:lstStyle/>
+          <a:p>
+            <a:pPr>
+              <a:spcAft>
+                <a:spcPts val="600"/>
+              </a:spcAft>
+            </a:pPr>
+            <a:r>
+              <a:rPr sz="1500">
+                <a:solidFill>
+                  <a:srgbClr val="22282E"/>
+                </a:solidFill>
+              </a:rPr>
+              <a:t>•  ❓ ¿Cómo sé qué pin es UART sin documentación?</a:t>
+            </a:r>
+          </a:p>
+          <a:p>
+            <a:pPr>
+              <a:spcAft>
+                <a:spcPts val="600"/>
+              </a:spcAft>
+            </a:pPr>
+            <a:r>
+              <a:rPr sz="1500">
+                <a:solidFill>
+                  <a:srgbClr val="22282E"/>
+                </a:solidFill>
+              </a:rPr>
+              <a:t>•  Mide con multímetro (GND por continuidad, VCC ~3.3 V estable) y con el analizador lógico observa qué pin tiene ráfagas de datos al encender: ese es TX.</a:t>
+            </a:r>
+          </a:p>
+          <a:p>
+            <a:pPr>
+              <a:spcAft>
+                <a:spcPts val="600"/>
+              </a:spcAft>
+            </a:pPr>
+            <a:r>
+              <a:rPr sz="1500">
+                <a:solidFill>
+                  <a:srgbClr val="22282E"/>
+                </a:solidFill>
+              </a:rPr>
+              <a:t>•  ❓ ¿Puedo dañar el dispositivo?</a:t>
+            </a:r>
+          </a:p>
+          <a:p>
+            <a:pPr>
+              <a:spcAft>
+                <a:spcPts val="600"/>
+              </a:spcAft>
+            </a:pPr>
+            <a:r>
+              <a:rPr sz="1500">
+                <a:solidFill>
+                  <a:srgbClr val="22282E"/>
+                </a:solidFill>
+              </a:rPr>
+              <a:t>•  Sí, si aplicas voltaje incorrecto o cortocircuitas pines. Trabaja a 3.3 V, verifica antes de conectar VCC y usa un adaptador con el mismo nivel lógico.</a:t>
+            </a:r>
+          </a:p>
+          <a:p>
+            <a:pPr>
+              <a:spcAft>
+                <a:spcPts val="600"/>
+              </a:spcAft>
+            </a:pPr>
+            <a:r>
+              <a:rPr sz="1500">
+                <a:solidFill>
+                  <a:srgbClr val="22282E"/>
+                </a:solidFill>
+              </a:rPr>
+              <a:t>•  ❓ ¿Por qué usar SPI si ya tengo UART?</a:t>
+            </a:r>
+          </a:p>
+          <a:p>
+            <a:pPr>
+              <a:spcAft>
+                <a:spcPts val="600"/>
+              </a:spcAft>
+            </a:pPr>
+            <a:r>
+              <a:rPr sz="1500">
+                <a:solidFill>
+                  <a:srgbClr val="22282E"/>
+                </a:solidFill>
+              </a:rPr>
+              <a:t>•  UART puede no dar shell o exponer solo parte del sistema; leer el flash por SPI extrae la imagen completa aunque el software lo impida.</a:t>
+            </a:r>
+          </a:p>
+        </p:txBody>
+      </p:sp>
+    </p:spTree>
+  </p:cSld>
+  <p:clrMapOvr>
+    <a:masterClrMapping/>
+  </p:clrMapOvr>
+</p:sld>
+</file>
+
+<file path=ppt/slides/slide15.xml><?xml version="1.0" encoding="utf-8"?>
+<p:sld xmlns:a="http://schemas.openxmlformats.org/drawingml/2006/main" xmlns:p="http://schemas.openxmlformats.org/presentationml/2006/main" xmlns:r="http://schemas.openxmlformats.org/officeDocument/2006/relationships">
+  <p:cSld>
+    <p:spTree>
+      <p:nvGrpSpPr>
+        <p:cNvPr id="1" name=""/>
+        <p:cNvGrpSpPr/>
+        <p:nvPr/>
+      </p:nvGrpSpPr>
+      <p:grpSpPr/>
+      <p:sp>
+        <p:nvSpPr>
+          <p:cNvPr id="2" name="TextBox 1"/>
+          <p:cNvSpPr txBox="1"/>
+          <p:nvPr/>
+        </p:nvSpPr>
+        <p:spPr>
+          <a:xfrm>
+            <a:off x="457200" y="320040"/>
+            <a:ext cx="8229600" cy="822960"/>
+          </a:xfrm>
+          <a:prstGeom prst="rect">
+            <a:avLst/>
+          </a:prstGeom>
+          <a:noFill/>
+        </p:spPr>
+        <p:txBody>
+          <a:bodyPr wrap="square">
+            <a:spAutoFit/>
+          </a:bodyPr>
+          <a:lstStyle/>
+          <a:p>
+            <a:r>
+              <a:rPr sz="2600" b="1">
+                <a:solidFill>
+                  <a:srgbClr val="0B3D2E"/>
+                </a:solidFill>
+              </a:rPr>
+              <a:t>🔗 Referencias</a:t>
+            </a:r>
+          </a:p>
+        </p:txBody>
+      </p:sp>
+      <p:sp>
+        <p:nvSpPr>
+          <p:cNvPr id="3" name="TextBox 2"/>
+          <p:cNvSpPr txBox="1"/>
+          <p:nvPr/>
+        </p:nvSpPr>
+        <p:spPr>
+          <a:xfrm>
+            <a:off x="457200" y="1280160"/>
+            <a:ext cx="8229600" cy="4937760"/>
+          </a:xfrm>
+          <a:prstGeom prst="rect">
+            <a:avLst/>
+          </a:prstGeom>
+          <a:noFill/>
+        </p:spPr>
+        <p:txBody>
+          <a:bodyPr wrap="square">
+            <a:spAutoFit/>
+          </a:bodyPr>
+          <a:lstStyle/>
+          <a:p>
+            <a:pPr>
+              <a:spcAft>
+                <a:spcPts val="600"/>
+              </a:spcAft>
+            </a:pPr>
+            <a:r>
+              <a:rPr sz="1500">
+                <a:solidFill>
+                  <a:srgbClr val="22282E"/>
+                </a:solidFill>
+              </a:rPr>
               <a:t>•  The Hardware Hacking Handbook — Jasper van Woudenberg, Colin O'Flynn (No Starch Press).</a:t>
             </a:r>
           </a:p>
@@ -3599,6 +4035,81 @@
           </a:p>
         </p:txBody>
       </p:sp>
+    </p:spTree>
+  </p:cSld>
+  <p:clrMapOvr>
+    <a:masterClrMapping/>
+  </p:clrMapOvr>
+</p:sld>
+</file>
+
+<file path=ppt/slides/slide16.xml><?xml version="1.0" encoding="utf-8"?>
+<p:sld xmlns:a="http://schemas.openxmlformats.org/drawingml/2006/main" xmlns:p="http://schemas.openxmlformats.org/presentationml/2006/main" xmlns:r="http://schemas.openxmlformats.org/officeDocument/2006/relationships">
+  <p:cSld>
+    <p:spTree>
+      <p:nvGrpSpPr>
+        <p:cNvPr id="1" name=""/>
+        <p:cNvGrpSpPr/>
+        <p:nvPr/>
+      </p:nvGrpSpPr>
+      <p:grpSpPr/>
+      <p:sp>
+        <p:nvSpPr>
+          <p:cNvPr id="2" name="TextBox 1"/>
+          <p:cNvSpPr txBox="1"/>
+          <p:nvPr/>
+        </p:nvSpPr>
+        <p:spPr>
+          <a:xfrm>
+            <a:off x="457200" y="274320"/>
+            <a:ext cx="8229600" cy="640080"/>
+          </a:xfrm>
+          <a:prstGeom prst="rect">
+            <a:avLst/>
+          </a:prstGeom>
+          <a:noFill/>
+        </p:spPr>
+        <p:txBody>
+          <a:bodyPr wrap="square">
+            <a:spAutoFit/>
+          </a:bodyPr>
+          <a:lstStyle/>
+          <a:p>
+            <a:r>
+              <a:rPr sz="2200" b="1">
+                <a:solidFill>
+                  <a:srgbClr val="0B3D2E"/>
+                </a:solidFill>
+              </a:rPr>
+              <a:t>Diagrama de la clase</a:t>
+            </a:r>
+          </a:p>
+        </p:txBody>
+      </p:sp>
+      <p:pic>
+        <p:nvPicPr>
+          <p:cNvPr id="3" name="Picture 2" descr="45909bca47f98bbd.png"/>
+          <p:cNvPicPr>
+            <a:picLocks noChangeAspect="1"/>
+          </p:cNvPicPr>
+          <p:nvPr/>
+        </p:nvPicPr>
+        <p:blipFill>
+          <a:blip r:embed="rId2"/>
+          <a:stretch>
+            <a:fillRect/>
+          </a:stretch>
+        </p:blipFill>
+        <p:spPr>
+          <a:xfrm>
+            <a:off x="1461800" y="1097280"/>
+            <a:ext cx="6220399" cy="5303520"/>
+          </a:xfrm>
+          <a:prstGeom prst="rect">
+            <a:avLst/>
+          </a:prstGeom>
+        </p:spPr>
+      </p:pic>
     </p:spTree>
   </p:cSld>
   <p:clrMapOvr>
@@ -3683,7 +4194,7 @@
                   <a:srgbClr val="22282E"/>
                 </a:solidFill>
               </a:rPr>
-              <a:t>•  Acceder al nivel más bajo de un dispositivo embebido a través de sus interfaces de depuración físicas: UART para obtener una consola serie, JTAG/SWD para control del procesador y volcado de memoria, y SPI para leer/escribir el chip de flash directamente. El alumno aprenderá a identificar puntos de prueba en una PCB, conectar un adaptador, y extraer firmware o consolas root del hardware propio.</a:t>
+              <a:t>•  Acceder al nivel más bajo de un dispositivo embebido a través de sus interfaces de depuración físicas: UART para obtener una consola serie, JTAG/SWD para control del procesador y volcado de memoria…</a:t>
             </a:r>
           </a:p>
         </p:txBody>
@@ -4092,7 +4603,7 @@
                   <a:srgbClr val="0B3D2E"/>
                 </a:solidFill>
               </a:rPr>
-              <a:t>📖 Definiciones y características</a:t>
+              <a:t>🧠 Explicación en profundidad</a:t>
             </a:r>
           </a:p>
         </p:txBody>
@@ -4130,82 +4641,52 @@
                   <a:srgbClr val="22282E"/>
                 </a:solidFill>
               </a:rPr>
-              <a:t>•  UART: comunicación serie asíncrona (TX, RX, GND, VCC) usada para consolas de depuración. Característica: a menudo expone un shell root sin autenticación.</a:t>
-            </a:r>
-          </a:p>
-          <a:p>
-            <a:pPr>
-              <a:spcAft>
-                <a:spcPts val="600"/>
-              </a:spcAft>
-            </a:pPr>
-            <a:r>
-              <a:rPr sz="1500">
-                <a:solidFill>
-                  <a:srgbClr val="22282E"/>
-                </a:solidFill>
-              </a:rPr>
-              <a:t>•  JTAG/SWD: interfaz de depuración que controla el procesador (leer/escribir registros y memoria). Característica: permite volcar RAM/flash y saltar protecciones.</a:t>
-            </a:r>
-          </a:p>
-          <a:p>
-            <a:pPr>
-              <a:spcAft>
-                <a:spcPts val="600"/>
-              </a:spcAft>
-            </a:pPr>
-            <a:r>
-              <a:rPr sz="1500">
-                <a:solidFill>
-                  <a:srgbClr val="22282E"/>
-                </a:solidFill>
-              </a:rPr>
-              <a:t>•  SPI: bus serie síncrono (MOSI, MISO, CLK, CS) que conecta el CPU al chip de flash. Característica: se puede leer el flash directamente con un programador.</a:t>
-            </a:r>
-          </a:p>
-          <a:p>
-            <a:pPr>
-              <a:spcAft>
-                <a:spcPts val="600"/>
-              </a:spcAft>
-            </a:pPr>
-            <a:r>
-              <a:rPr sz="1500">
-                <a:solidFill>
-                  <a:srgbClr val="22282E"/>
-                </a:solidFill>
-              </a:rPr>
-              <a:t>•  Analizador lógico: dispositivo que captura señales digitales para decodificar protocolos. Característica: identifica baud rate y pinout desconocidos.</a:t>
-            </a:r>
-          </a:p>
-          <a:p>
-            <a:pPr>
-              <a:spcAft>
-                <a:spcPts val="600"/>
-              </a:spcAft>
-            </a:pPr>
-            <a:r>
-              <a:rPr sz="1500">
-                <a:solidFill>
-                  <a:srgbClr val="22282E"/>
-                </a:solidFill>
-              </a:rPr>
-              <a:t>•  OpenOCD: software que habla JTAG/SWD con adaptadores para depuración y volcado. Característica: soporta multitud de targets ARM/MIPS.</a:t>
-            </a:r>
-          </a:p>
-          <a:p>
-            <a:pPr>
-              <a:spcAft>
-                <a:spcPts val="600"/>
-              </a:spcAft>
-            </a:pPr>
-            <a:r>
-              <a:rPr sz="1500">
-                <a:solidFill>
-                  <a:srgbClr val="22282E"/>
-                </a:solidFill>
-              </a:rPr>
-              <a:t>•  flashrom: utilidad para leer/escribir chips de flash SPI. Característica: soporta muchos programadores (CH341A, Bus Pirate).</a:t>
+              <a:t>•  UART, JTAG/SWD y SPI cumplen funciones diferentes. UART es una consola serie asíncrona; JTAG/SWD ofrece depuración y prueba del chip; SPI conecta periféricos, con frecuencia flash. Encontrar pines no…</a:t>
+            </a:r>
+          </a:p>
+          <a:p>
+            <a:pPr>
+              <a:spcAft>
+                <a:spcPts val="600"/>
+              </a:spcAft>
+            </a:pPr>
+            <a:r>
+              <a:rPr sz="1500">
+                <a:solidFill>
+                  <a:srgbClr val="22282E"/>
+                </a:solidFill>
+              </a:rPr>
+              <a:t>•  La primera práctica es pasiva: fotografías, continuidad con el equipo apagado y analizador lógico de alta impedancia. En UART se comparte tierra, se confirma nivel —a menudo 3,3 V o 1,8 V— y se…</a:t>
+            </a:r>
+          </a:p>
+          <a:p>
+            <a:pPr>
+              <a:spcAft>
+                <a:spcPts val="600"/>
+              </a:spcAft>
+            </a:pPr>
+            <a:r>
+              <a:rPr sz="1500">
+                <a:solidFill>
+                  <a:srgbClr val="22282E"/>
+                </a:solidFill>
+              </a:rPr>
+              <a:t>•  En JTAG/SWD, deshabilitar depuración en producción puede ser apropiado, pero debe conservarse una ruta segura de fabricación y recuperación. Los fusibles son potencialmente irreversibles y nunca se…</a:t>
+            </a:r>
+          </a:p>
+          <a:p>
+            <a:pPr>
+              <a:spcAft>
+                <a:spcPts val="600"/>
+              </a:spcAft>
+            </a:pPr>
+            <a:r>
+              <a:rPr sz="1500">
+                <a:solidFill>
+                  <a:srgbClr val="22282E"/>
+                </a:solidFill>
+              </a:rPr>
+              <a:t>•  Tres lecturas de flash producen hashes distintos. Antes de analizar «firmware cambiante», el alumno revisa alimentación, contacto y contención del bus. Solo cuando las lecturas coinciden se acepta…</a:t>
             </a:r>
           </a:p>
         </p:txBody>
@@ -4256,7 +4737,7 @@
                   <a:srgbClr val="0B3D2E"/>
                 </a:solidFill>
               </a:rPr>
-              <a:t>🧰 Herramientas y preparación</a:t>
+              <a:t>📔 Glosario operativo</a:t>
             </a:r>
           </a:p>
         </p:txBody>
@@ -4294,67 +4775,82 @@
                   <a:srgbClr val="22282E"/>
                 </a:solidFill>
               </a:rPr>
-              <a:t>•  Adaptador USB-UART (FTDI/CP2102), multímetro, analizador lógico (Saleae/clon), programador SPI (CH341A) o Bus Pirate, JTAG/SWD (J-Link, FT2232, ST-Link).</a:t>
-            </a:r>
-          </a:p>
-          <a:p>
-            <a:pPr>
-              <a:spcAft>
-                <a:spcPts val="600"/>
-              </a:spcAft>
-            </a:pPr>
-            <a:r>
-              <a:rPr sz="1500">
-                <a:solidFill>
-                  <a:srgbClr val="22282E"/>
-                </a:solidFill>
-              </a:rPr>
-              <a:t>•  Cables Dupont, pinza de test (SOIC clip) para leer flash sin desoldar.</a:t>
-            </a:r>
-          </a:p>
-          <a:p>
-            <a:pPr>
-              <a:spcAft>
-                <a:spcPts val="600"/>
-              </a:spcAft>
-            </a:pPr>
-            <a:r>
-              <a:rPr sz="1500">
-                <a:solidFill>
-                  <a:srgbClr val="22282E"/>
-                </a:solidFill>
-              </a:rPr>
-              <a:t>•  screen /dev/ttyUSB0 115200          # o: picocom -b 115200 /dev/ttyUSB0</a:t>
-            </a:r>
-          </a:p>
-          <a:p>
-            <a:pPr>
-              <a:spcAft>
-                <a:spcPts val="600"/>
-              </a:spcAft>
-            </a:pPr>
-            <a:r>
-              <a:rPr sz="1500">
-                <a:solidFill>
-                  <a:srgbClr val="22282E"/>
-                </a:solidFill>
-              </a:rPr>
-              <a:t>•  openocd -f interface/jlink.cfg -f target/&lt;soc&gt;.cfg</a:t>
-            </a:r>
-          </a:p>
-          <a:p>
-            <a:pPr>
-              <a:spcAft>
-                <a:spcPts val="600"/>
-              </a:spcAft>
-            </a:pPr>
-            <a:r>
-              <a:rPr sz="1500">
-                <a:solidFill>
-                  <a:srgbClr val="22282E"/>
-                </a:solidFill>
-              </a:rPr>
-              <a:t>•  flashrom -p ch341aspi -r flashdump.bin</a:t>
+              <a:t>•  Término — Definición útil</a:t>
+            </a:r>
+          </a:p>
+          <a:p>
+            <a:pPr>
+              <a:spcAft>
+                <a:spcPts val="600"/>
+              </a:spcAft>
+            </a:pPr>
+            <a:r>
+              <a:rPr sz="1500">
+                <a:solidFill>
+                  <a:srgbClr val="22282E"/>
+                </a:solidFill>
+              </a:rPr>
+              <a:t>•  UART — Enlace serie asíncrono con RX/TX y referencia común.</a:t>
+            </a:r>
+          </a:p>
+          <a:p>
+            <a:pPr>
+              <a:spcAft>
+                <a:spcPts val="600"/>
+              </a:spcAft>
+            </a:pPr>
+            <a:r>
+              <a:rPr sz="1500">
+                <a:solidFill>
+                  <a:srgbClr val="22282E"/>
+                </a:solidFill>
+              </a:rPr>
+              <a:t>•  JTAG/SWD — Interfaces de depuración y prueba de circuitos.</a:t>
+            </a:r>
+          </a:p>
+          <a:p>
+            <a:pPr>
+              <a:spcAft>
+                <a:spcPts val="600"/>
+              </a:spcAft>
+            </a:pPr>
+            <a:r>
+              <a:rPr sz="1500">
+                <a:solidFill>
+                  <a:srgbClr val="22282E"/>
+                </a:solidFill>
+              </a:rPr>
+              <a:t>•  SPI — Bus síncrono usado por memorias y periféricos.</a:t>
+            </a:r>
+          </a:p>
+          <a:p>
+            <a:pPr>
+              <a:spcAft>
+                <a:spcPts val="600"/>
+              </a:spcAft>
+            </a:pPr>
+            <a:r>
+              <a:rPr sz="1500">
+                <a:solidFill>
+                  <a:srgbClr val="22282E"/>
+                </a:solidFill>
+              </a:rPr>
+              <a:t>•  Nivel lógico — Tensión que representa estados digitales; no asumir 5 V.</a:t>
+            </a:r>
+          </a:p>
+          <a:p>
+            <a:pPr>
+              <a:spcAft>
+                <a:spcPts val="600"/>
+              </a:spcAft>
+            </a:pPr>
+            <a:r>
+              <a:rPr sz="1500">
+                <a:solidFill>
+                  <a:srgbClr val="22282E"/>
+                </a:solidFill>
+              </a:rPr>
+              <a:t>•  Contención — Dos dispositivos conducen una línea de manera incompatible.</a:t>
             </a:r>
           </a:p>
         </p:txBody>
@@ -4405,7 +4901,7 @@
                   <a:srgbClr val="0B3D2E"/>
                 </a:solidFill>
               </a:rPr>
-              <a:t>🧪 Laboratorio guiado</a:t>
+              <a:t>✅ Criterio de dominio</a:t>
             </a:r>
           </a:p>
         </p:txBody>
@@ -4443,97 +4939,7 @@
                   <a:srgbClr val="22282E"/>
                 </a:solidFill>
               </a:rPr>
-              <a:t>•  Inspecciona la PCB de un dispositivo propio: busca cabeceras de 4 pines (UART) y de 2x5/10 pines (JTAG), y el chip de flash (SOIC-8).</a:t>
-            </a:r>
-          </a:p>
-          <a:p>
-            <a:pPr>
-              <a:spcAft>
-                <a:spcPts val="600"/>
-              </a:spcAft>
-            </a:pPr>
-            <a:r>
-              <a:rPr sz="1500">
-                <a:solidFill>
-                  <a:srgbClr val="22282E"/>
-                </a:solidFill>
-              </a:rPr>
-              <a:t>•  Identifica el pinout UART: con el multímetro localiza GND (continuidad al plano de tierra), VCC (~3.3 V), y usa el analizador lógico para hallar TX (actividad al arrancar) y el baud rate.</a:t>
-            </a:r>
-          </a:p>
-          <a:p>
-            <a:pPr>
-              <a:spcAft>
-                <a:spcPts val="600"/>
-              </a:spcAft>
-            </a:pPr>
-            <a:r>
-              <a:rPr sz="1500">
-                <a:solidFill>
-                  <a:srgbClr val="22282E"/>
-                </a:solidFill>
-              </a:rPr>
-              <a:t>•  Conecta el adaptador UART (TX↔RX cruzados, GND común, sin conectar VCC si el equipo se auto-alimenta) y abre la consola con screen.</a:t>
-            </a:r>
-          </a:p>
-          <a:p>
-            <a:pPr>
-              <a:spcAft>
-                <a:spcPts val="600"/>
-              </a:spcAft>
-            </a:pPr>
-            <a:r>
-              <a:rPr sz="1500">
-                <a:solidFill>
-                  <a:srgbClr val="22282E"/>
-                </a:solidFill>
-              </a:rPr>
-              <a:t>•  Captura el arranque: observa los logs de U-Boot; intenta interrumpirlo para entrar a su consola.</a:t>
-            </a:r>
-          </a:p>
-          <a:p>
-            <a:pPr>
-              <a:spcAft>
-                <a:spcPts val="600"/>
-              </a:spcAft>
-            </a:pPr>
-            <a:r>
-              <a:rPr sz="1500">
-                <a:solidFill>
-                  <a:srgbClr val="22282E"/>
-                </a:solidFill>
-              </a:rPr>
-              <a:t>•  Busca shell: al terminar el arranque, comprueba si hay una consola root sin contraseña.</a:t>
-            </a:r>
-          </a:p>
-          <a:p>
-            <a:pPr>
-              <a:spcAft>
-                <a:spcPts val="600"/>
-              </a:spcAft>
-            </a:pPr>
-            <a:r>
-              <a:rPr sz="1500">
-                <a:solidFill>
-                  <a:srgbClr val="22282E"/>
-                </a:solidFill>
-              </a:rPr>
-              <a:t>•  JTAG/SWD: conecta el adaptador, lanza OpenOCD, halt el CPU y dumpimage de la flash/RAM.</a:t>
-            </a:r>
-          </a:p>
-          <a:p>
-            <a:pPr>
-              <a:spcAft>
-                <a:spcPts val="600"/>
-              </a:spcAft>
-            </a:pPr>
-            <a:r>
-              <a:rPr sz="1500">
-                <a:solidFill>
-                  <a:srgbClr val="22282E"/>
-                </a:solidFill>
-              </a:rPr>
-              <a:t>•  SPI directo: con la pinza SOIC sobre el chip de flash, vuelca su contenido con flashrom y analízalo con binwalk (clase 267).</a:t>
+              <a:t>•  Hay dominio cuando el alumno identifica una interfaz sin dañar la placa, documenta niveles y pinout, obtiene lecturas repetibles en modo no destructivo y explica cómo reducir acceso de producción…</a:t>
             </a:r>
           </a:p>
         </p:txBody>
@@ -4584,7 +4990,7 @@
                   <a:srgbClr val="0B3D2E"/>
                 </a:solidFill>
               </a:rPr>
-              <a:t>✍️ Ejercicios</a:t>
+              <a:t>📖 Definiciones y características</a:t>
             </a:r>
           </a:p>
         </p:txBody>
@@ -4622,82 +5028,82 @@
                   <a:srgbClr val="22282E"/>
                 </a:solidFill>
               </a:rPr>
-              <a:t>•  Identifica y etiqueta el pinout UART de una placa propia usando multímetro y analizador lógico.</a:t>
-            </a:r>
-          </a:p>
-          <a:p>
-            <a:pPr>
-              <a:spcAft>
-                <a:spcPts val="600"/>
-              </a:spcAft>
-            </a:pPr>
-            <a:r>
-              <a:rPr sz="1500">
-                <a:solidFill>
-                  <a:srgbClr val="22282E"/>
-                </a:solidFill>
-              </a:rPr>
-              <a:t>•  Captura y guarda el log de arranque completo por UART.</a:t>
-            </a:r>
-          </a:p>
-          <a:p>
-            <a:pPr>
-              <a:spcAft>
-                <a:spcPts val="600"/>
-              </a:spcAft>
-            </a:pPr>
-            <a:r>
-              <a:rPr sz="1500">
-                <a:solidFill>
-                  <a:srgbClr val="22282E"/>
-                </a:solidFill>
-              </a:rPr>
-              <a:t>•  Interrumpe U-Boot y lista sus variables de entorno.</a:t>
-            </a:r>
-          </a:p>
-          <a:p>
-            <a:pPr>
-              <a:spcAft>
-                <a:spcPts val="600"/>
-              </a:spcAft>
-            </a:pPr>
-            <a:r>
-              <a:rPr sz="1500">
-                <a:solidFill>
-                  <a:srgbClr val="22282E"/>
-                </a:solidFill>
-              </a:rPr>
-              <a:t>•  Vuelca el flash SPI con flashrom y verifica su tamaño esperado.</a:t>
-            </a:r>
-          </a:p>
-          <a:p>
-            <a:pPr>
-              <a:spcAft>
-                <a:spcPts val="600"/>
-              </a:spcAft>
-            </a:pPr>
-            <a:r>
-              <a:rPr sz="1500">
-                <a:solidFill>
-                  <a:srgbClr val="22282E"/>
-                </a:solidFill>
-              </a:rPr>
-              <a:t>•  Con OpenOCD, detén el CPU y lee una región de memoria.</a:t>
-            </a:r>
-          </a:p>
-          <a:p>
-            <a:pPr>
-              <a:spcAft>
-                <a:spcPts val="600"/>
-              </a:spcAft>
-            </a:pPr>
-            <a:r>
-              <a:rPr sz="1500">
-                <a:solidFill>
-                  <a:srgbClr val="22282E"/>
-                </a:solidFill>
-              </a:rPr>
-              <a:t>•  Compara el firmware obtenido por SPI con la descarga oficial (si existe).</a:t>
+              <a:t>•  UART: comunicación serie asíncrona (TX, RX, GND, VCC) usada para consolas de depuración. Característica: a menudo expone un shell root sin autenticación.</a:t>
+            </a:r>
+          </a:p>
+          <a:p>
+            <a:pPr>
+              <a:spcAft>
+                <a:spcPts val="600"/>
+              </a:spcAft>
+            </a:pPr>
+            <a:r>
+              <a:rPr sz="1500">
+                <a:solidFill>
+                  <a:srgbClr val="22282E"/>
+                </a:solidFill>
+              </a:rPr>
+              <a:t>•  JTAG/SWD: interfaz de depuración que controla el procesador (leer/escribir registros y memoria). Característica: permite volcar RAM/flash y saltar protecciones.</a:t>
+            </a:r>
+          </a:p>
+          <a:p>
+            <a:pPr>
+              <a:spcAft>
+                <a:spcPts val="600"/>
+              </a:spcAft>
+            </a:pPr>
+            <a:r>
+              <a:rPr sz="1500">
+                <a:solidFill>
+                  <a:srgbClr val="22282E"/>
+                </a:solidFill>
+              </a:rPr>
+              <a:t>•  SPI: bus serie síncrono (MOSI, MISO, CLK, CS) que conecta el CPU al chip de flash. Característica: se puede leer el flash directamente con un programador.</a:t>
+            </a:r>
+          </a:p>
+          <a:p>
+            <a:pPr>
+              <a:spcAft>
+                <a:spcPts val="600"/>
+              </a:spcAft>
+            </a:pPr>
+            <a:r>
+              <a:rPr sz="1500">
+                <a:solidFill>
+                  <a:srgbClr val="22282E"/>
+                </a:solidFill>
+              </a:rPr>
+              <a:t>•  Analizador lógico: dispositivo que captura señales digitales para decodificar protocolos. Característica: identifica baud rate y pinout desconocidos.</a:t>
+            </a:r>
+          </a:p>
+          <a:p>
+            <a:pPr>
+              <a:spcAft>
+                <a:spcPts val="600"/>
+              </a:spcAft>
+            </a:pPr>
+            <a:r>
+              <a:rPr sz="1500">
+                <a:solidFill>
+                  <a:srgbClr val="22282E"/>
+                </a:solidFill>
+              </a:rPr>
+              <a:t>•  OpenOCD: software que habla JTAG/SWD con adaptadores para depuración y volcado. Característica: soporta multitud de targets ARM/MIPS.</a:t>
+            </a:r>
+          </a:p>
+          <a:p>
+            <a:pPr>
+              <a:spcAft>
+                <a:spcPts val="600"/>
+              </a:spcAft>
+            </a:pPr>
+            <a:r>
+              <a:rPr sz="1500">
+                <a:solidFill>
+                  <a:srgbClr val="22282E"/>
+                </a:solidFill>
+              </a:rPr>
+              <a:t>•  flashrom: utilidad para leer/escribir chips de flash SPI. Característica: soporta muchos programadores (CH341A, Bus Pirate).</a:t>
             </a:r>
           </a:p>
         </p:txBody>
@@ -4748,7 +5154,7 @@
                   <a:srgbClr val="0B3D2E"/>
                 </a:solidFill>
               </a:rPr>
-              <a:t>📝 Reto verificable</a:t>
+              <a:t>🧰 Herramientas y preparación</a:t>
             </a:r>
           </a:p>
         </p:txBody>
@@ -4786,7 +5192,22 @@
                   <a:srgbClr val="22282E"/>
                 </a:solidFill>
               </a:rPr>
-              <a:t>•  Extrae el firmware de un dispositivo propio por dos vías físicas distintas (por ejemplo, consola UART que permite cat de una partición y volcado directo por SPI), o consigue una consola root por UART. Criterio de aceptación: obtienes un shell interactivo por UART o un volcado de flash que binwalk desempaqueta correctamente, documentando el pinout que usaste.</a:t>
+              <a:t>•  Adaptador USB-UART (FTDI/CP2102), multímetro, analizador lógico (Saleae/clon), programador SPI (CH341A) o Bus Pirate, JTAG/SWD (J-Link, FT2232, ST-Link).</a:t>
+            </a:r>
+          </a:p>
+          <a:p>
+            <a:pPr>
+              <a:spcAft>
+                <a:spcPts val="600"/>
+              </a:spcAft>
+            </a:pPr>
+            <a:r>
+              <a:rPr sz="1500">
+                <a:solidFill>
+                  <a:srgbClr val="22282E"/>
+                </a:solidFill>
+              </a:rPr>
+              <a:t>•  Cables Dupont, pinza de test (SOIC clip) para leer flash sin desoldar.</a:t>
             </a:r>
           </a:p>
         </p:txBody>
